--- a/assets/figures-editable/c3-c4/c4-e41.pptx
+++ b/assets/figures-editable/c3-c4/c4-e41.pptx
@@ -3104,8 +3104,8 @@
         </p:nvSpPr>
         <p:spPr>
           <a:xfrm>
-            <a:off x="274320" y="137160"/>
-            <a:ext cx="11612880" cy="365760"/>
+            <a:off x="274320" y="118872"/>
+            <a:ext cx="11612880" cy="340105"/>
           </a:xfrm>
           <a:prstGeom prst="rect">
             <a:avLst/>
@@ -3114,7 +3114,7 @@
           <a:effectLst/>
         </p:spPr>
         <p:txBody>
-          <a:bodyPr wrap="square" lIns="27432" rIns="27432" tIns="18288" bIns="18288" anchor="ctr">
+          <a:bodyPr wrap="none" lIns="18288" rIns="18288" tIns="18288" bIns="18288" anchor="t">
             <a:spAutoFit/>
           </a:bodyPr>
           <a:lstStyle/>
@@ -3125,7 +3125,7 @@
               </a:spcAft>
             </a:pPr>
             <a:r>
-              <a:rPr sz="2100" b="0" i="0">
+              <a:rPr sz="1900" b="1" i="0">
                 <a:solidFill>
                   <a:srgbClr val="8EDBD4"/>
                 </a:solidFill>
@@ -3138,21 +3138,90 @@
       </p:sp>
       <p:sp>
         <p:nvSpPr>
-          <p:cNvPr id="3" name="C4-E41 rect 1" descr="sci-ppt:o001"/>
+          <p:cNvPr id="3" name="C4-E41 round_rect 1" descr="sci-ppt:o001"/>
           <p:cNvSpPr/>
           <p:nvPr/>
         </p:nvSpPr>
         <p:spPr>
           <a:xfrm>
-            <a:off x="594360" y="1417320"/>
-            <a:ext cx="3200400" cy="1325880"/>
-          </a:xfrm>
-          <a:prstGeom prst="rect">
+            <a:off x="365760" y="914400"/>
+            <a:ext cx="5394960" cy="4846320"/>
+          </a:xfrm>
+          <a:prstGeom prst="roundRect">
             <a:avLst/>
           </a:prstGeom>
           <a:solidFill>
             <a:srgbClr val="213E4B"/>
           </a:solidFill>
+          <a:ln w="20320">
+            <a:solidFill>
+              <a:srgbClr val="8EDBD4"/>
+            </a:solidFill>
+          </a:ln>
+          <a:effectLst/>
+        </p:spPr>
+        <p:txBody>
+          <a:bodyPr rtlCol="0" anchor="ctr"/>
+          <a:lstStyle/>
+          <a:p>
+            <a:pPr algn="ctr"/>
+          </a:p>
+        </p:txBody>
+      </p:sp>
+      <p:sp>
+        <p:nvSpPr>
+          <p:cNvPr id="4" name="C4-E41 text 2" descr="sci-ppt:o002"/>
+          <p:cNvSpPr txBox="1"/>
+          <p:nvPr/>
+        </p:nvSpPr>
+        <p:spPr>
+          <a:xfrm>
+            <a:off x="475488" y="969264"/>
+            <a:ext cx="5175504" cy="254889"/>
+          </a:xfrm>
+          <a:prstGeom prst="rect">
+            <a:avLst/>
+          </a:prstGeom>
+          <a:noFill/>
+          <a:effectLst/>
+        </p:spPr>
+        <p:txBody>
+          <a:bodyPr wrap="none" lIns="18288" rIns="18288" tIns="18288" bIns="18288" anchor="t">
+            <a:spAutoFit/>
+          </a:bodyPr>
+          <a:lstStyle/>
+          <a:p>
+            <a:pPr algn="l">
+              <a:spcAft>
+                <a:spcPts val="0"/>
+              </a:spcAft>
+            </a:pPr>
+            <a:r>
+              <a:rPr sz="1350" b="1" i="0">
+                <a:solidFill>
+                  <a:srgbClr val="8EDBD4"/>
+                </a:solidFill>
+                <a:latin typeface="Arial"/>
+              </a:rPr>
+              <a:t>Power ledger (schematic)</a:t>
+            </a:r>
+          </a:p>
+        </p:txBody>
+      </p:sp>
+      <p:cxnSp>
+        <p:nvCxnSpPr>
+          <p:cNvPr id="5" name="C4-E41 line 3" descr="sci-ppt:o003"/>
+          <p:cNvCxnSpPr/>
+          <p:nvPr/>
+        </p:nvCxnSpPr>
+        <p:spPr>
+          <a:xfrm>
+            <a:off x="640080" y="4572000"/>
+            <a:ext cx="4846320" cy="0"/>
+          </a:xfrm>
+          <a:prstGeom prst="line">
+            <a:avLst/>
+          </a:prstGeom>
           <a:ln w="19050">
             <a:solidFill>
               <a:srgbClr val="B4C7D2"/>
@@ -3160,95 +3229,21 @@
           </a:ln>
           <a:effectLst/>
         </p:spPr>
-        <p:txBody>
-          <a:bodyPr rtlCol="0" anchor="ctr"/>
-          <a:lstStyle/>
-          <a:p>
-            <a:pPr algn="ctr"/>
-          </a:p>
-        </p:txBody>
-      </p:sp>
-      <p:sp>
-        <p:nvSpPr>
-          <p:cNvPr id="4" name="C4-E41 text 2" descr="sci-ppt:o002"/>
-          <p:cNvSpPr txBox="1"/>
-          <p:nvPr/>
-        </p:nvSpPr>
-        <p:spPr>
-          <a:xfrm>
-            <a:off x="758952" y="1627632"/>
-            <a:ext cx="2871216" cy="914400"/>
-          </a:xfrm>
-          <a:prstGeom prst="rect">
-            <a:avLst/>
-          </a:prstGeom>
-          <a:noFill/>
-          <a:effectLst/>
-        </p:spPr>
-        <p:txBody>
-          <a:bodyPr wrap="square" lIns="27432" rIns="27432" tIns="18288" bIns="18288" anchor="ctr">
-            <a:spAutoFit/>
-          </a:bodyPr>
-          <a:lstStyle/>
-          <a:p>
-            <a:pPr algn="l">
-              <a:spcAft>
-                <a:spcPts val="0"/>
-              </a:spcAft>
-            </a:pPr>
-            <a:r>
-              <a:rPr sz="1800" b="0" i="0">
-                <a:solidFill>
-                  <a:srgbClr val="E7F0F3"/>
-                </a:solidFill>
-                <a:latin typeface="Arial"/>
-              </a:rPr>
-              <a:t>Applied solid power</a:t>
-            </a:r>
-          </a:p>
-        </p:txBody>
-      </p:sp>
+      </p:cxnSp>
       <p:cxnSp>
         <p:nvCxnSpPr>
-          <p:cNvPr id="5" name="C4-E41 arrow 3" descr="sci-ppt:o003"/>
+          <p:cNvPr id="6" name="C4-E41 line 4" descr="sci-ppt:o004"/>
           <p:cNvCxnSpPr/>
           <p:nvPr/>
         </p:nvCxnSpPr>
         <p:spPr>
           <a:xfrm>
-            <a:off x="3794760" y="2057400"/>
-            <a:ext cx="640080" cy="0"/>
+            <a:off x="640080" y="1554480"/>
+            <a:ext cx="0" cy="3017520"/>
           </a:xfrm>
           <a:prstGeom prst="line">
             <a:avLst/>
           </a:prstGeom>
-          <a:ln w="25400">
-            <a:solidFill>
-              <a:srgbClr val="8EDBD4"/>
-            </a:solidFill>
-            <a:headEnd type="none" w="med" len="med"/>
-            <a:tailEnd type="triangle" w="med" len="med"/>
-          </a:ln>
-          <a:effectLst/>
-        </p:spPr>
-      </p:cxnSp>
-      <p:sp>
-        <p:nvSpPr>
-          <p:cNvPr id="6" name="C4-E41 rect 4" descr="sci-ppt:o004"/>
-          <p:cNvSpPr/>
-          <p:nvPr/>
-        </p:nvSpPr>
-        <p:spPr>
-          <a:xfrm>
-            <a:off x="4480560" y="1417320"/>
-            <a:ext cx="3200400" cy="1325880"/>
-          </a:xfrm>
-          <a:prstGeom prst="rect">
-            <a:avLst/>
-          </a:prstGeom>
-          <a:solidFill>
-            <a:srgbClr val="213E4B"/>
-          </a:solidFill>
           <a:ln w="19050">
             <a:solidFill>
               <a:srgbClr val="B4C7D2"/>
@@ -3256,24 +3251,61 @@
           </a:ln>
           <a:effectLst/>
         </p:spPr>
-        <p:txBody>
-          <a:bodyPr rtlCol="0" anchor="ctr"/>
-          <a:lstStyle/>
-          <a:p>
-            <a:pPr algn="ctr"/>
-          </a:p>
-        </p:txBody>
-      </p:sp>
-      <p:sp>
-        <p:nvSpPr>
-          <p:cNvPr id="7" name="C4-E41 text 5" descr="sci-ppt:o005"/>
+      </p:cxnSp>
+      <p:cxnSp>
+        <p:nvCxnSpPr>
+          <p:cNvPr id="7" name="C4-E41 line 5" descr="sci-ppt:o005"/>
+          <p:cNvCxnSpPr/>
+          <p:nvPr/>
+        </p:nvCxnSpPr>
+        <p:spPr>
+          <a:xfrm>
+            <a:off x="576071" y="4572000"/>
+            <a:ext cx="64009" cy="0"/>
+          </a:xfrm>
+          <a:prstGeom prst="line">
+            <a:avLst/>
+          </a:prstGeom>
+          <a:ln w="12700">
+            <a:solidFill>
+              <a:srgbClr val="B4C7D2"/>
+            </a:solidFill>
+          </a:ln>
+          <a:effectLst/>
+        </p:spPr>
+      </p:cxnSp>
+      <p:cxnSp>
+        <p:nvCxnSpPr>
+          <p:cNvPr id="8" name="C4-E41 line 6" descr="sci-ppt:o006"/>
+          <p:cNvCxnSpPr/>
+          <p:nvPr/>
+        </p:nvCxnSpPr>
+        <p:spPr>
+          <a:xfrm>
+            <a:off x="640080" y="4572000"/>
+            <a:ext cx="4846320" cy="0"/>
+          </a:xfrm>
+          <a:prstGeom prst="line">
+            <a:avLst/>
+          </a:prstGeom>
+          <a:ln w="7620">
+            <a:solidFill>
+              <a:srgbClr val="2E4756"/>
+            </a:solidFill>
+          </a:ln>
+          <a:effectLst/>
+        </p:spPr>
+      </p:cxnSp>
+      <p:sp>
+        <p:nvSpPr>
+          <p:cNvPr id="9" name="C4-E41 text 7" descr="sci-ppt:o007"/>
           <p:cNvSpPr txBox="1"/>
           <p:nvPr/>
         </p:nvSpPr>
         <p:spPr>
           <a:xfrm>
-            <a:off x="4645152" y="1627632"/>
-            <a:ext cx="2871216" cy="914400"/>
+            <a:off x="-228600" y="4489704"/>
+            <a:ext cx="777240" cy="208407"/>
           </a:xfrm>
           <a:prstGeom prst="rect">
             <a:avLst/>
@@ -3282,7 +3314,563 @@
           <a:effectLst/>
         </p:spPr>
         <p:txBody>
-          <a:bodyPr wrap="square" lIns="27432" rIns="27432" tIns="18288" bIns="18288" anchor="ctr">
+          <a:bodyPr wrap="none" lIns="18288" rIns="18288" tIns="18288" bIns="18288" anchor="t">
+            <a:spAutoFit/>
+          </a:bodyPr>
+          <a:lstStyle/>
+          <a:p>
+            <a:pPr algn="r">
+              <a:spcAft>
+                <a:spcPts val="0"/>
+              </a:spcAft>
+            </a:pPr>
+            <a:r>
+              <a:rPr sz="1050" b="0" i="0">
+                <a:solidFill>
+                  <a:srgbClr val="B4C7D2"/>
+                </a:solidFill>
+                <a:latin typeface="Arial"/>
+              </a:rPr>
+              <a:t>0</a:t>
+            </a:r>
+          </a:p>
+        </p:txBody>
+      </p:sp>
+      <p:cxnSp>
+        <p:nvCxnSpPr>
+          <p:cNvPr id="10" name="C4-E41 line 8" descr="sci-ppt:o008"/>
+          <p:cNvCxnSpPr/>
+          <p:nvPr/>
+        </p:nvCxnSpPr>
+        <p:spPr>
+          <a:xfrm>
+            <a:off x="576071" y="3314700"/>
+            <a:ext cx="64009" cy="0"/>
+          </a:xfrm>
+          <a:prstGeom prst="line">
+            <a:avLst/>
+          </a:prstGeom>
+          <a:ln w="12700">
+            <a:solidFill>
+              <a:srgbClr val="B4C7D2"/>
+            </a:solidFill>
+          </a:ln>
+          <a:effectLst/>
+        </p:spPr>
+      </p:cxnSp>
+      <p:cxnSp>
+        <p:nvCxnSpPr>
+          <p:cNvPr id="11" name="C4-E41 line 9" descr="sci-ppt:o009"/>
+          <p:cNvCxnSpPr/>
+          <p:nvPr/>
+        </p:nvCxnSpPr>
+        <p:spPr>
+          <a:xfrm>
+            <a:off x="640080" y="3314700"/>
+            <a:ext cx="4846320" cy="0"/>
+          </a:xfrm>
+          <a:prstGeom prst="line">
+            <a:avLst/>
+          </a:prstGeom>
+          <a:ln w="7620">
+            <a:solidFill>
+              <a:srgbClr val="2E4756"/>
+            </a:solidFill>
+          </a:ln>
+          <a:effectLst/>
+        </p:spPr>
+      </p:cxnSp>
+      <p:sp>
+        <p:nvSpPr>
+          <p:cNvPr id="12" name="C4-E41 text 10" descr="sci-ppt:o010"/>
+          <p:cNvSpPr txBox="1"/>
+          <p:nvPr/>
+        </p:nvSpPr>
+        <p:spPr>
+          <a:xfrm>
+            <a:off x="-228600" y="3232404"/>
+            <a:ext cx="777240" cy="208407"/>
+          </a:xfrm>
+          <a:prstGeom prst="rect">
+            <a:avLst/>
+          </a:prstGeom>
+          <a:noFill/>
+          <a:effectLst/>
+        </p:spPr>
+        <p:txBody>
+          <a:bodyPr wrap="none" lIns="18288" rIns="18288" tIns="18288" bIns="18288" anchor="t">
+            <a:spAutoFit/>
+          </a:bodyPr>
+          <a:lstStyle/>
+          <a:p>
+            <a:pPr algn="r">
+              <a:spcAft>
+                <a:spcPts val="0"/>
+              </a:spcAft>
+            </a:pPr>
+            <a:r>
+              <a:rPr sz="1050" b="0" i="0">
+                <a:solidFill>
+                  <a:srgbClr val="B4C7D2"/>
+                </a:solidFill>
+                <a:latin typeface="Arial"/>
+              </a:rPr>
+              <a:t>0.5</a:t>
+            </a:r>
+          </a:p>
+        </p:txBody>
+      </p:sp>
+      <p:cxnSp>
+        <p:nvCxnSpPr>
+          <p:cNvPr id="13" name="C4-E41 line 11" descr="sci-ppt:o011"/>
+          <p:cNvCxnSpPr/>
+          <p:nvPr/>
+        </p:nvCxnSpPr>
+        <p:spPr>
+          <a:xfrm>
+            <a:off x="576071" y="2057400"/>
+            <a:ext cx="64009" cy="0"/>
+          </a:xfrm>
+          <a:prstGeom prst="line">
+            <a:avLst/>
+          </a:prstGeom>
+          <a:ln w="12700">
+            <a:solidFill>
+              <a:srgbClr val="B4C7D2"/>
+            </a:solidFill>
+          </a:ln>
+          <a:effectLst/>
+        </p:spPr>
+      </p:cxnSp>
+      <p:cxnSp>
+        <p:nvCxnSpPr>
+          <p:cNvPr id="14" name="C4-E41 line 12" descr="sci-ppt:o012"/>
+          <p:cNvCxnSpPr/>
+          <p:nvPr/>
+        </p:nvCxnSpPr>
+        <p:spPr>
+          <a:xfrm>
+            <a:off x="640080" y="2057400"/>
+            <a:ext cx="4846320" cy="0"/>
+          </a:xfrm>
+          <a:prstGeom prst="line">
+            <a:avLst/>
+          </a:prstGeom>
+          <a:ln w="7620">
+            <a:solidFill>
+              <a:srgbClr val="2E4756"/>
+            </a:solidFill>
+          </a:ln>
+          <a:effectLst/>
+        </p:spPr>
+      </p:cxnSp>
+      <p:sp>
+        <p:nvSpPr>
+          <p:cNvPr id="15" name="C4-E41 text 13" descr="sci-ppt:o013"/>
+          <p:cNvSpPr txBox="1"/>
+          <p:nvPr/>
+        </p:nvSpPr>
+        <p:spPr>
+          <a:xfrm>
+            <a:off x="-228600" y="1975104"/>
+            <a:ext cx="777240" cy="208407"/>
+          </a:xfrm>
+          <a:prstGeom prst="rect">
+            <a:avLst/>
+          </a:prstGeom>
+          <a:noFill/>
+          <a:effectLst/>
+        </p:spPr>
+        <p:txBody>
+          <a:bodyPr wrap="none" lIns="18288" rIns="18288" tIns="18288" bIns="18288" anchor="t">
+            <a:spAutoFit/>
+          </a:bodyPr>
+          <a:lstStyle/>
+          <a:p>
+            <a:pPr algn="r">
+              <a:spcAft>
+                <a:spcPts val="0"/>
+              </a:spcAft>
+            </a:pPr>
+            <a:r>
+              <a:rPr sz="1050" b="0" i="0">
+                <a:solidFill>
+                  <a:srgbClr val="B4C7D2"/>
+                </a:solidFill>
+                <a:latin typeface="Arial"/>
+              </a:rPr>
+              <a:t>1</a:t>
+            </a:r>
+          </a:p>
+        </p:txBody>
+      </p:sp>
+      <p:sp>
+        <p:nvSpPr>
+          <p:cNvPr id="16" name="C4-E41 rect 14" descr="sci-ppt:o014"/>
+          <p:cNvSpPr/>
+          <p:nvPr/>
+        </p:nvSpPr>
+        <p:spPr>
+          <a:xfrm>
+            <a:off x="866241" y="2057400"/>
+            <a:ext cx="1163116" cy="2514600"/>
+          </a:xfrm>
+          <a:prstGeom prst="rect">
+            <a:avLst/>
+          </a:prstGeom>
+          <a:solidFill>
+            <a:srgbClr val="8EDBD4">
+              <a:alpha val="85000"/>
+            </a:srgbClr>
+          </a:solidFill>
+          <a:ln w="12700">
+            <a:solidFill>
+              <a:srgbClr val="8EDBD4">
+                <a:alpha val="85000"/>
+              </a:srgbClr>
+            </a:solidFill>
+          </a:ln>
+          <a:effectLst/>
+        </p:spPr>
+        <p:txBody>
+          <a:bodyPr rtlCol="0" anchor="ctr"/>
+          <a:lstStyle/>
+          <a:p>
+            <a:pPr algn="ctr"/>
+          </a:p>
+        </p:txBody>
+      </p:sp>
+      <p:sp>
+        <p:nvSpPr>
+          <p:cNvPr id="17" name="C4-E41 text 15" descr="sci-ppt:o015"/>
+          <p:cNvSpPr txBox="1"/>
+          <p:nvPr/>
+        </p:nvSpPr>
+        <p:spPr>
+          <a:xfrm>
+            <a:off x="637641" y="1783080"/>
+            <a:ext cx="1620316" cy="223900"/>
+          </a:xfrm>
+          <a:prstGeom prst="rect">
+            <a:avLst/>
+          </a:prstGeom>
+          <a:noFill/>
+          <a:effectLst/>
+        </p:spPr>
+        <p:txBody>
+          <a:bodyPr wrap="none" lIns="18288" rIns="18288" tIns="18288" bIns="18288" anchor="t">
+            <a:spAutoFit/>
+          </a:bodyPr>
+          <a:lstStyle/>
+          <a:p>
+            <a:pPr algn="ctr">
+              <a:spcAft>
+                <a:spcPts val="0"/>
+              </a:spcAft>
+            </a:pPr>
+            <a:r>
+              <a:rPr sz="1150" b="1" i="0">
+                <a:solidFill>
+                  <a:srgbClr val="E7F0F3"/>
+                </a:solidFill>
+                <a:latin typeface="Arial"/>
+              </a:rPr>
+              <a:t>1.00</a:t>
+            </a:r>
+          </a:p>
+        </p:txBody>
+      </p:sp>
+      <p:sp>
+        <p:nvSpPr>
+          <p:cNvPr id="18" name="C4-E41 text 16" descr="sci-ppt:o016"/>
+          <p:cNvSpPr txBox="1"/>
+          <p:nvPr/>
+        </p:nvSpPr>
+        <p:spPr>
+          <a:xfrm>
+            <a:off x="591921" y="4645152"/>
+            <a:ext cx="1711756" cy="216153"/>
+          </a:xfrm>
+          <a:prstGeom prst="rect">
+            <a:avLst/>
+          </a:prstGeom>
+          <a:noFill/>
+          <a:effectLst/>
+        </p:spPr>
+        <p:txBody>
+          <a:bodyPr wrap="none" lIns="18288" rIns="18288" tIns="18288" bIns="18288" anchor="t">
+            <a:spAutoFit/>
+          </a:bodyPr>
+          <a:lstStyle/>
+          <a:p>
+            <a:pPr algn="ctr">
+              <a:spcAft>
+                <a:spcPts val="0"/>
+              </a:spcAft>
+            </a:pPr>
+            <a:r>
+              <a:rPr sz="1100" b="0" i="0">
+                <a:solidFill>
+                  <a:srgbClr val="B4C7D2"/>
+                </a:solidFill>
+                <a:latin typeface="Arial"/>
+              </a:rPr>
+              <a:t>applied work</a:t>
+            </a:r>
+          </a:p>
+        </p:txBody>
+      </p:sp>
+      <p:sp>
+        <p:nvSpPr>
+          <p:cNvPr id="19" name="C4-E41 rect 17" descr="sci-ppt:o017"/>
+          <p:cNvSpPr/>
+          <p:nvPr/>
+        </p:nvSpPr>
+        <p:spPr>
+          <a:xfrm>
+            <a:off x="2481681" y="2057400"/>
+            <a:ext cx="1163116" cy="628650"/>
+          </a:xfrm>
+          <a:prstGeom prst="rect">
+            <a:avLst/>
+          </a:prstGeom>
+          <a:solidFill>
+            <a:srgbClr val="F2B880">
+              <a:alpha val="85000"/>
+            </a:srgbClr>
+          </a:solidFill>
+          <a:ln w="12700">
+            <a:solidFill>
+              <a:srgbClr val="F2B880">
+                <a:alpha val="85000"/>
+              </a:srgbClr>
+            </a:solidFill>
+          </a:ln>
+          <a:effectLst/>
+        </p:spPr>
+        <p:txBody>
+          <a:bodyPr rtlCol="0" anchor="ctr"/>
+          <a:lstStyle/>
+          <a:p>
+            <a:pPr algn="ctr"/>
+          </a:p>
+        </p:txBody>
+      </p:sp>
+      <p:sp>
+        <p:nvSpPr>
+          <p:cNvPr id="20" name="C4-E41 text 18" descr="sci-ppt:o018"/>
+          <p:cNvSpPr txBox="1"/>
+          <p:nvPr/>
+        </p:nvSpPr>
+        <p:spPr>
+          <a:xfrm>
+            <a:off x="2253081" y="1783080"/>
+            <a:ext cx="1620316" cy="223900"/>
+          </a:xfrm>
+          <a:prstGeom prst="rect">
+            <a:avLst/>
+          </a:prstGeom>
+          <a:noFill/>
+          <a:effectLst/>
+        </p:spPr>
+        <p:txBody>
+          <a:bodyPr wrap="none" lIns="18288" rIns="18288" tIns="18288" bIns="18288" anchor="t">
+            <a:spAutoFit/>
+          </a:bodyPr>
+          <a:lstStyle/>
+          <a:p>
+            <a:pPr algn="ctr">
+              <a:spcAft>
+                <a:spcPts val="0"/>
+              </a:spcAft>
+            </a:pPr>
+            <a:r>
+              <a:rPr sz="1150" b="1" i="0">
+                <a:solidFill>
+                  <a:srgbClr val="E7F0F3"/>
+                </a:solidFill>
+                <a:latin typeface="Arial"/>
+              </a:rPr>
+              <a:t>-0.25</a:t>
+            </a:r>
+          </a:p>
+        </p:txBody>
+      </p:sp>
+      <p:sp>
+        <p:nvSpPr>
+          <p:cNvPr id="21" name="C4-E41 text 19" descr="sci-ppt:o019"/>
+          <p:cNvSpPr txBox="1"/>
+          <p:nvPr/>
+        </p:nvSpPr>
+        <p:spPr>
+          <a:xfrm>
+            <a:off x="2207361" y="4645152"/>
+            <a:ext cx="1711756" cy="216153"/>
+          </a:xfrm>
+          <a:prstGeom prst="rect">
+            <a:avLst/>
+          </a:prstGeom>
+          <a:noFill/>
+          <a:effectLst/>
+        </p:spPr>
+        <p:txBody>
+          <a:bodyPr wrap="none" lIns="18288" rIns="18288" tIns="18288" bIns="18288" anchor="t">
+            <a:spAutoFit/>
+          </a:bodyPr>
+          <a:lstStyle/>
+          <a:p>
+            <a:pPr algn="ctr">
+              <a:spcAft>
+                <a:spcPts val="0"/>
+              </a:spcAft>
+            </a:pPr>
+            <a:r>
+              <a:rPr sz="1100" b="0" i="0">
+                <a:solidFill>
+                  <a:srgbClr val="B4C7D2"/>
+                </a:solidFill>
+                <a:latin typeface="Arial"/>
+              </a:rPr>
+              <a:t>− cohesive loss</a:t>
+            </a:r>
+          </a:p>
+        </p:txBody>
+      </p:sp>
+      <p:sp>
+        <p:nvSpPr>
+          <p:cNvPr id="22" name="C4-E41 rect 20" descr="sci-ppt:o020"/>
+          <p:cNvSpPr/>
+          <p:nvPr/>
+        </p:nvSpPr>
+        <p:spPr>
+          <a:xfrm>
+            <a:off x="4097121" y="2686050"/>
+            <a:ext cx="1163116" cy="1885950"/>
+          </a:xfrm>
+          <a:prstGeom prst="rect">
+            <a:avLst/>
+          </a:prstGeom>
+          <a:solidFill>
+            <a:srgbClr val="7FC8F8">
+              <a:alpha val="85000"/>
+            </a:srgbClr>
+          </a:solidFill>
+          <a:ln w="12700">
+            <a:solidFill>
+              <a:srgbClr val="7FC8F8">
+                <a:alpha val="85000"/>
+              </a:srgbClr>
+            </a:solidFill>
+          </a:ln>
+          <a:effectLst/>
+        </p:spPr>
+        <p:txBody>
+          <a:bodyPr rtlCol="0" anchor="ctr"/>
+          <a:lstStyle/>
+          <a:p>
+            <a:pPr algn="ctr"/>
+          </a:p>
+        </p:txBody>
+      </p:sp>
+      <p:sp>
+        <p:nvSpPr>
+          <p:cNvPr id="23" name="C4-E41 text 21" descr="sci-ppt:o021"/>
+          <p:cNvSpPr txBox="1"/>
+          <p:nvPr/>
+        </p:nvSpPr>
+        <p:spPr>
+          <a:xfrm>
+            <a:off x="3868521" y="2411730"/>
+            <a:ext cx="1620316" cy="223900"/>
+          </a:xfrm>
+          <a:prstGeom prst="rect">
+            <a:avLst/>
+          </a:prstGeom>
+          <a:noFill/>
+          <a:effectLst/>
+        </p:spPr>
+        <p:txBody>
+          <a:bodyPr wrap="none" lIns="18288" rIns="18288" tIns="18288" bIns="18288" anchor="t">
+            <a:spAutoFit/>
+          </a:bodyPr>
+          <a:lstStyle/>
+          <a:p>
+            <a:pPr algn="ctr">
+              <a:spcAft>
+                <a:spcPts val="0"/>
+              </a:spcAft>
+            </a:pPr>
+            <a:r>
+              <a:rPr sz="1150" b="1" i="0">
+                <a:solidFill>
+                  <a:srgbClr val="E7F0F3"/>
+                </a:solidFill>
+                <a:latin typeface="Arial"/>
+              </a:rPr>
+              <a:t>0.75</a:t>
+            </a:r>
+          </a:p>
+        </p:txBody>
+      </p:sp>
+      <p:sp>
+        <p:nvSpPr>
+          <p:cNvPr id="24" name="C4-E41 text 22" descr="sci-ppt:o022"/>
+          <p:cNvSpPr txBox="1"/>
+          <p:nvPr/>
+        </p:nvSpPr>
+        <p:spPr>
+          <a:xfrm>
+            <a:off x="3822801" y="4645152"/>
+            <a:ext cx="1711756" cy="216153"/>
+          </a:xfrm>
+          <a:prstGeom prst="rect">
+            <a:avLst/>
+          </a:prstGeom>
+          <a:noFill/>
+          <a:effectLst/>
+        </p:spPr>
+        <p:txBody>
+          <a:bodyPr wrap="none" lIns="18288" rIns="18288" tIns="18288" bIns="18288" anchor="t">
+            <a:spAutoFit/>
+          </a:bodyPr>
+          <a:lstStyle/>
+          <a:p>
+            <a:pPr algn="ctr">
+              <a:spcAft>
+                <a:spcPts val="0"/>
+              </a:spcAft>
+            </a:pPr>
+            <a:r>
+              <a:rPr sz="1100" b="0" i="0">
+                <a:solidFill>
+                  <a:srgbClr val="B4C7D2"/>
+                </a:solidFill>
+                <a:latin typeface="Arial"/>
+              </a:rPr>
+              <a:t>= stored + moving</a:t>
+            </a:r>
+          </a:p>
+        </p:txBody>
+      </p:sp>
+      <p:sp>
+        <p:nvSpPr>
+          <p:cNvPr id="25" name="C4-E41 text 23" descr="sci-ppt:o023"/>
+          <p:cNvSpPr txBox="1"/>
+          <p:nvPr/>
+        </p:nvSpPr>
+        <p:spPr>
+          <a:xfrm>
+            <a:off x="548640" y="4983480"/>
+            <a:ext cx="5120640" cy="223900"/>
+          </a:xfrm>
+          <a:prstGeom prst="rect">
+            <a:avLst/>
+          </a:prstGeom>
+          <a:noFill/>
+          <a:effectLst/>
+        </p:spPr>
+        <p:txBody>
+          <a:bodyPr wrap="none" lIns="18288" rIns="18288" tIns="18288" bIns="18288" anchor="t">
             <a:spAutoFit/>
           </a:bodyPr>
           <a:lstStyle/>
@@ -3293,83 +3881,27 @@
               </a:spcAft>
             </a:pPr>
             <a:r>
-              <a:rPr sz="1800" b="0" i="0">
+              <a:rPr sz="1150" b="1" i="0">
                 <a:solidFill>
                   <a:srgbClr val="E7F0F3"/>
                 </a:solidFill>
                 <a:latin typeface="Arial"/>
               </a:rPr>
-              <a:t>Kinetic + elastic storage</a:t>
-            </a:r>
-          </a:p>
-        </p:txBody>
-      </p:sp>
-      <p:cxnSp>
-        <p:nvCxnSpPr>
-          <p:cNvPr id="8" name="C4-E41 arrow 6" descr="sci-ppt:o006"/>
-          <p:cNvCxnSpPr/>
-          <p:nvPr/>
-        </p:nvCxnSpPr>
-        <p:spPr>
-          <a:xfrm>
-            <a:off x="7680960" y="2057400"/>
-            <a:ext cx="640080" cy="0"/>
-          </a:xfrm>
-          <a:prstGeom prst="line">
-            <a:avLst/>
-          </a:prstGeom>
-          <a:ln w="25400">
-            <a:solidFill>
-              <a:srgbClr val="8EDBD4"/>
-            </a:solidFill>
-            <a:headEnd type="none" w="med" len="med"/>
-            <a:tailEnd type="triangle" w="med" len="med"/>
-          </a:ln>
-          <a:effectLst/>
-        </p:spPr>
-      </p:cxnSp>
-      <p:sp>
-        <p:nvSpPr>
-          <p:cNvPr id="9" name="C4-E41 rect 7" descr="sci-ppt:o007"/>
-          <p:cNvSpPr/>
-          <p:nvPr/>
-        </p:nvSpPr>
-        <p:spPr>
-          <a:xfrm>
-            <a:off x="8366760" y="1417320"/>
-            <a:ext cx="3200400" cy="1325880"/>
-          </a:xfrm>
-          <a:prstGeom prst="rect">
-            <a:avLst/>
-          </a:prstGeom>
-          <a:solidFill>
-            <a:srgbClr val="213E4B"/>
-          </a:solidFill>
-          <a:ln w="19050">
-            <a:solidFill>
-              <a:srgbClr val="B4C7D2"/>
-            </a:solidFill>
-          </a:ln>
-          <a:effectLst/>
-        </p:spPr>
-        <p:txBody>
-          <a:bodyPr rtlCol="0" anchor="ctr"/>
-          <a:lstStyle/>
-          <a:p>
-            <a:pPr algn="ctr"/>
-          </a:p>
-        </p:txBody>
-      </p:sp>
-      <p:sp>
-        <p:nvSpPr>
-          <p:cNvPr id="10" name="C4-E41 text 8" descr="sci-ppt:o008"/>
+              <a:t>d(K_f + U_b + U_T)/dt = ∫ p_load ẇ dA − ∫ t_coh ẇ dA</a:t>
+            </a:r>
+          </a:p>
+        </p:txBody>
+      </p:sp>
+      <p:sp>
+        <p:nvSpPr>
+          <p:cNvPr id="26" name="C4-E41 text 24" descr="sci-ppt:o024"/>
           <p:cNvSpPr txBox="1"/>
           <p:nvPr/>
         </p:nvSpPr>
         <p:spPr>
           <a:xfrm>
-            <a:off x="8531352" y="1627632"/>
-            <a:ext cx="2871216" cy="914400"/>
+            <a:off x="548640" y="5394960"/>
+            <a:ext cx="5120640" cy="223900"/>
           </a:xfrm>
           <a:prstGeom prst="rect">
             <a:avLst/>
@@ -3378,109 +3910,7 @@
           <a:effectLst/>
         </p:spPr>
         <p:txBody>
-          <a:bodyPr wrap="square" lIns="27432" rIns="27432" tIns="18288" bIns="18288" anchor="ctr">
-            <a:spAutoFit/>
-          </a:bodyPr>
-          <a:lstStyle/>
-          <a:p>
-            <a:pPr algn="l">
-              <a:spcAft>
-                <a:spcPts val="0"/>
-              </a:spcAft>
-            </a:pPr>
-            <a:r>
-              <a:rPr sz="1800" b="0" i="0">
-                <a:solidFill>
-                  <a:srgbClr val="E7F0F3"/>
-                </a:solidFill>
-                <a:latin typeface="Arial"/>
-              </a:rPr>
-              <a:t>Interface power + losses</a:t>
-            </a:r>
-          </a:p>
-        </p:txBody>
-      </p:sp>
-      <p:sp>
-        <p:nvSpPr>
-          <p:cNvPr id="11" name="C4-E41 text 9" descr="sci-ppt:o009"/>
-          <p:cNvSpPr txBox="1"/>
-          <p:nvPr/>
-        </p:nvSpPr>
-        <p:spPr>
-          <a:xfrm>
-            <a:off x="731520" y="3246120"/>
-            <a:ext cx="10789920" cy="457200"/>
-          </a:xfrm>
-          <a:prstGeom prst="rect">
-            <a:avLst/>
-          </a:prstGeom>
-          <a:noFill/>
-          <a:effectLst/>
-        </p:spPr>
-        <p:txBody>
-          <a:bodyPr wrap="square" lIns="27432" rIns="27432" tIns="18288" bIns="18288" anchor="ctr">
-            <a:spAutoFit/>
-          </a:bodyPr>
-          <a:lstStyle/>
-          <a:p>
-            <a:pPr algn="l">
-              <a:spcAft>
-                <a:spcPts val="0"/>
-              </a:spcAft>
-            </a:pPr>
-            <a:r>
-              <a:rPr sz="1800" b="0" i="0">
-                <a:solidFill>
-                  <a:srgbClr val="8EDBD4"/>
-                </a:solidFill>
-                <a:latin typeface="Arial"/>
-              </a:rPr>
-              <a:t>Work, storage, fracture consumption and net impulse retain separate meanings.</a:t>
-            </a:r>
-          </a:p>
-        </p:txBody>
-      </p:sp>
-      <p:cxnSp>
-        <p:nvCxnSpPr>
-          <p:cNvPr id="12" name="C4-E41 line 10" descr="sci-ppt:o010"/>
-          <p:cNvCxnSpPr/>
-          <p:nvPr/>
-        </p:nvCxnSpPr>
-        <p:spPr>
-          <a:xfrm>
-            <a:off x="274320" y="3977639"/>
-            <a:ext cx="11612880" cy="0"/>
-          </a:xfrm>
-          <a:prstGeom prst="line">
-            <a:avLst/>
-          </a:prstGeom>
-          <a:ln w="12700">
-            <a:solidFill>
-              <a:srgbClr val="405967"/>
-            </a:solidFill>
-          </a:ln>
-          <a:effectLst/>
-        </p:spPr>
-      </p:cxnSp>
-      <p:sp>
-        <p:nvSpPr>
-          <p:cNvPr id="13" name="C4-E41 text 11" descr="sci-ppt:o011"/>
-          <p:cNvSpPr txBox="1"/>
-          <p:nvPr/>
-        </p:nvSpPr>
-        <p:spPr>
-          <a:xfrm>
-            <a:off x="320040" y="4096512"/>
-            <a:ext cx="5715000" cy="246888"/>
-          </a:xfrm>
-          <a:prstGeom prst="rect">
-            <a:avLst/>
-          </a:prstGeom>
-          <a:noFill/>
-          <a:effectLst/>
-        </p:spPr>
-        <p:txBody>
-          <a:bodyPr wrap="square" lIns="27432" rIns="27432" tIns="18288" bIns="18288" anchor="ctr">
+          <a:bodyPr wrap="none" lIns="18288" rIns="18288" tIns="18288" bIns="18288" anchor="t">
             <a:spAutoFit/>
           </a:bodyPr>
           <a:lstStyle/>
@@ -3497,21 +3927,53 @@
                 </a:solidFill>
                 <a:latin typeface="Arial"/>
               </a:rPr>
-              <a:t>• p_load ẇ → incoming solid power</a:t>
-            </a:r>
-          </a:p>
-        </p:txBody>
-      </p:sp>
-      <p:sp>
-        <p:nvSpPr>
-          <p:cNvPr id="14" name="C4-E41 text 12" descr="sci-ppt:o012"/>
+              <a:t>Each term has units of watts.</a:t>
+            </a:r>
+          </a:p>
+        </p:txBody>
+      </p:sp>
+      <p:sp>
+        <p:nvSpPr>
+          <p:cNvPr id="27" name="C4-E41 round_rect 25" descr="sci-ppt:o025"/>
+          <p:cNvSpPr/>
+          <p:nvPr/>
+        </p:nvSpPr>
+        <p:spPr>
+          <a:xfrm>
+            <a:off x="5943600" y="914400"/>
+            <a:ext cx="5897880" cy="4846320"/>
+          </a:xfrm>
+          <a:prstGeom prst="roundRect">
+            <a:avLst/>
+          </a:prstGeom>
+          <a:solidFill>
+            <a:srgbClr val="213E4B"/>
+          </a:solidFill>
+          <a:ln w="20320">
+            <a:solidFill>
+              <a:srgbClr val="8EDBD4"/>
+            </a:solidFill>
+          </a:ln>
+          <a:effectLst/>
+        </p:spPr>
+        <p:txBody>
+          <a:bodyPr rtlCol="0" anchor="ctr"/>
+          <a:lstStyle/>
+          <a:p>
+            <a:pPr algn="ctr"/>
+          </a:p>
+        </p:txBody>
+      </p:sp>
+      <p:sp>
+        <p:nvSpPr>
+          <p:cNvPr id="28" name="C4-E41 text 26" descr="sci-ppt:o026"/>
           <p:cNvSpPr txBox="1"/>
           <p:nvPr/>
         </p:nvSpPr>
         <p:spPr>
           <a:xfrm>
-            <a:off x="6217920" y="4096512"/>
-            <a:ext cx="5715000" cy="246888"/>
+            <a:off x="6053328" y="969264"/>
+            <a:ext cx="5678424" cy="254889"/>
           </a:xfrm>
           <a:prstGeom prst="rect">
             <a:avLst/>
@@ -3520,7 +3982,7 @@
           <a:effectLst/>
         </p:spPr>
         <p:txBody>
-          <a:bodyPr wrap="square" lIns="27432" rIns="27432" tIns="18288" bIns="18288" anchor="ctr">
+          <a:bodyPr wrap="none" lIns="18288" rIns="18288" tIns="18288" bIns="18288" anchor="t">
             <a:spAutoFit/>
           </a:bodyPr>
           <a:lstStyle/>
@@ -3531,27 +3993,27 @@
               </a:spcAft>
             </a:pPr>
             <a:r>
-              <a:rPr sz="1150" b="0" i="0">
+              <a:rPr sz="1350" b="1" i="0">
                 <a:solidFill>
-                  <a:srgbClr val="B4C7D2"/>
+                  <a:srgbClr val="8EDBD4"/>
                 </a:solidFill>
                 <a:latin typeface="Arial"/>
               </a:rPr>
-              <a:t>• t_coh ẇ → interface power</a:t>
-            </a:r>
-          </a:p>
-        </p:txBody>
-      </p:sp>
-      <p:sp>
-        <p:nvSpPr>
-          <p:cNvPr id="15" name="C4-E41 text 13" descr="sci-ppt:o013"/>
+              <a:t>Multiply the balance by ẇ and integrate</a:t>
+            </a:r>
+          </a:p>
+        </p:txBody>
+      </p:sp>
+      <p:sp>
+        <p:nvSpPr>
+          <p:cNvPr id="29" name="C4-E41 text 27" descr="sci-ppt:o027"/>
           <p:cNvSpPr txBox="1"/>
           <p:nvPr/>
         </p:nvSpPr>
         <p:spPr>
           <a:xfrm>
-            <a:off x="320040" y="4329684"/>
-            <a:ext cx="5715000" cy="246888"/>
+            <a:off x="6126480" y="1508760"/>
+            <a:ext cx="1188720" cy="239395"/>
           </a:xfrm>
           <a:prstGeom prst="rect">
             <a:avLst/>
@@ -3560,7 +4022,7 @@
           <a:effectLst/>
         </p:spPr>
         <p:txBody>
-          <a:bodyPr wrap="square" lIns="27432" rIns="27432" tIns="18288" bIns="18288" anchor="ctr">
+          <a:bodyPr wrap="none" lIns="18288" rIns="18288" tIns="18288" bIns="18288" anchor="t">
             <a:spAutoFit/>
           </a:bodyPr>
           <a:lstStyle/>
@@ -3571,27 +4033,27 @@
               </a:spcAft>
             </a:pPr>
             <a:r>
-              <a:rPr sz="1150" b="0" i="0">
+              <a:rPr sz="1250" b="1" i="0">
                 <a:solidFill>
-                  <a:srgbClr val="B4C7D2"/>
+                  <a:srgbClr val="7FC8F8"/>
                 </a:solidFill>
                 <a:latin typeface="Arial"/>
               </a:rPr>
-              <a:t>• m_A, ẇ, ẅ → K_f storage</a:t>
-            </a:r>
-          </a:p>
-        </p:txBody>
-      </p:sp>
-      <p:sp>
-        <p:nvSpPr>
-          <p:cNvPr id="16" name="C4-E41 text 14" descr="sci-ppt:o014"/>
+              <a:t>inertia</a:t>
+            </a:r>
+          </a:p>
+        </p:txBody>
+      </p:sp>
+      <p:sp>
+        <p:nvSpPr>
+          <p:cNvPr id="30" name="C4-E41 text 28" descr="sci-ppt:o028"/>
           <p:cNvSpPr txBox="1"/>
           <p:nvPr/>
         </p:nvSpPr>
         <p:spPr>
           <a:xfrm>
-            <a:off x="6217920" y="4329684"/>
-            <a:ext cx="5715000" cy="246888"/>
+            <a:off x="7315200" y="1508760"/>
+            <a:ext cx="4480560" cy="239395"/>
           </a:xfrm>
           <a:prstGeom prst="rect">
             <a:avLst/>
@@ -3600,7 +4062,7 @@
           <a:effectLst/>
         </p:spPr>
         <p:txBody>
-          <a:bodyPr wrap="square" lIns="27432" rIns="27432" tIns="18288" bIns="18288" anchor="ctr">
+          <a:bodyPr wrap="none" lIns="18288" rIns="18288" tIns="18288" bIns="18288" anchor="t">
             <a:spAutoFit/>
           </a:bodyPr>
           <a:lstStyle/>
@@ -3611,27 +4073,27 @@
               </a:spcAft>
             </a:pPr>
             <a:r>
-              <a:rPr sz="1150" b="0" i="0">
+              <a:rPr sz="1250" b="1" i="0">
                 <a:solidFill>
-                  <a:srgbClr val="B4C7D2"/>
+                  <a:srgbClr val="E7F0F3"/>
                 </a:solidFill>
                 <a:latin typeface="Arial"/>
               </a:rPr>
-              <a:t>• D_f, ∇⁴w → U_b storage</a:t>
-            </a:r>
-          </a:p>
-        </p:txBody>
-      </p:sp>
-      <p:sp>
-        <p:nvSpPr>
-          <p:cNvPr id="17" name="C4-E41 text 15" descr="sci-ppt:o015"/>
+              <a:t>∫ m_A ẅ ẇ dA = dK_f/dt</a:t>
+            </a:r>
+          </a:p>
+        </p:txBody>
+      </p:sp>
+      <p:sp>
+        <p:nvSpPr>
+          <p:cNvPr id="31" name="C4-E41 text 29" descr="sci-ppt:o029"/>
           <p:cNvSpPr txBox="1"/>
           <p:nvPr/>
         </p:nvSpPr>
         <p:spPr>
           <a:xfrm>
-            <a:off x="320040" y="4562856"/>
-            <a:ext cx="5715000" cy="246888"/>
+            <a:off x="6126480" y="2194560"/>
+            <a:ext cx="1188720" cy="239395"/>
           </a:xfrm>
           <a:prstGeom prst="rect">
             <a:avLst/>
@@ -3640,7 +4102,7 @@
           <a:effectLst/>
         </p:spPr>
         <p:txBody>
-          <a:bodyPr wrap="square" lIns="27432" rIns="27432" tIns="18288" bIns="18288" anchor="ctr">
+          <a:bodyPr wrap="none" lIns="18288" rIns="18288" tIns="18288" bIns="18288" anchor="t">
             <a:spAutoFit/>
           </a:bodyPr>
           <a:lstStyle/>
@@ -3651,27 +4113,27 @@
               </a:spcAft>
             </a:pPr>
             <a:r>
-              <a:rPr sz="1150" b="0" i="0">
+              <a:rPr sz="1250" b="1" i="0">
                 <a:solidFill>
-                  <a:srgbClr val="B4C7D2"/>
+                  <a:srgbClr val="F2B880"/>
                 </a:solidFill>
                 <a:latin typeface="Arial"/>
               </a:rPr>
-              <a:t>• T₀, ∇²w → U_T storage</a:t>
-            </a:r>
-          </a:p>
-        </p:txBody>
-      </p:sp>
-      <p:sp>
-        <p:nvSpPr>
-          <p:cNvPr id="18" name="C4-E41 text 16" descr="sci-ppt:o016"/>
+              <a:t>bending</a:t>
+            </a:r>
+          </a:p>
+        </p:txBody>
+      </p:sp>
+      <p:sp>
+        <p:nvSpPr>
+          <p:cNvPr id="32" name="C4-E41 text 30" descr="sci-ppt:o030"/>
           <p:cNvSpPr txBox="1"/>
           <p:nvPr/>
         </p:nvSpPr>
         <p:spPr>
           <a:xfrm>
-            <a:off x="6217920" y="4562856"/>
-            <a:ext cx="5715000" cy="246888"/>
+            <a:off x="7315200" y="2194560"/>
+            <a:ext cx="4480560" cy="239395"/>
           </a:xfrm>
           <a:prstGeom prst="rect">
             <a:avLst/>
@@ -3680,7 +4142,7 @@
           <a:effectLst/>
         </p:spPr>
         <p:txBody>
-          <a:bodyPr wrap="square" lIns="27432" rIns="27432" tIns="18288" bIns="18288" anchor="ctr">
+          <a:bodyPr wrap="none" lIns="18288" rIns="18288" tIns="18288" bIns="18288" anchor="t">
             <a:spAutoFit/>
           </a:bodyPr>
           <a:lstStyle/>
@@ -3691,27 +4153,27 @@
               </a:spcAft>
             </a:pPr>
             <a:r>
-              <a:rPr sz="1150" b="0" i="0">
+              <a:rPr sz="1250" b="1" i="0">
                 <a:solidFill>
-                  <a:srgbClr val="B4C7D2"/>
+                  <a:srgbClr val="E7F0F3"/>
                 </a:solidFill>
                 <a:latin typeface="Arial"/>
               </a:rPr>
-              <a:t>• Ω_f, dA — reference plane</a:t>
-            </a:r>
-          </a:p>
-        </p:txBody>
-      </p:sp>
-      <p:sp>
-        <p:nvSpPr>
-          <p:cNvPr id="19" name="C4-E41 text 17" descr="sci-ppt:o017"/>
+              <a:t>∫ D_f ∇⁴w ẇ dA = dU_b/dt</a:t>
+            </a:r>
+          </a:p>
+        </p:txBody>
+      </p:sp>
+      <p:sp>
+        <p:nvSpPr>
+          <p:cNvPr id="33" name="C4-E41 text 31" descr="sci-ppt:o031"/>
           <p:cNvSpPr txBox="1"/>
           <p:nvPr/>
         </p:nvSpPr>
         <p:spPr>
           <a:xfrm>
-            <a:off x="320040" y="4796028"/>
-            <a:ext cx="5715000" cy="246888"/>
+            <a:off x="6126480" y="2880360"/>
+            <a:ext cx="1188720" cy="239395"/>
           </a:xfrm>
           <a:prstGeom prst="rect">
             <a:avLst/>
@@ -3720,7 +4182,7 @@
           <a:effectLst/>
         </p:spPr>
         <p:txBody>
-          <a:bodyPr wrap="square" lIns="27432" rIns="27432" tIns="18288" bIns="18288" anchor="ctr">
+          <a:bodyPr wrap="none" lIns="18288" rIns="18288" tIns="18288" bIns="18288" anchor="t">
             <a:spAutoFit/>
           </a:bodyPr>
           <a:lstStyle/>
@@ -3731,27 +4193,27 @@
               </a:spcAft>
             </a:pPr>
             <a:r>
-              <a:rPr sz="1150" b="0" i="0">
+              <a:rPr sz="1250" b="1" i="0">
                 <a:solidFill>
-                  <a:srgbClr val="B4C7D2"/>
+                  <a:srgbClr val="F28BA0"/>
                 </a:solidFill>
                 <a:latin typeface="Arial"/>
               </a:rPr>
-              <a:t>• t — event time</a:t>
-            </a:r>
-          </a:p>
-        </p:txBody>
-      </p:sp>
-      <p:sp>
-        <p:nvSpPr>
-          <p:cNvPr id="20" name="C4-E41 text 18" descr="sci-ppt:o018"/>
+              <a:t>tension</a:t>
+            </a:r>
+          </a:p>
+        </p:txBody>
+      </p:sp>
+      <p:sp>
+        <p:nvSpPr>
+          <p:cNvPr id="34" name="C4-E41 text 32" descr="sci-ppt:o032"/>
           <p:cNvSpPr txBox="1"/>
           <p:nvPr/>
         </p:nvSpPr>
         <p:spPr>
           <a:xfrm>
-            <a:off x="320040" y="5596128"/>
-            <a:ext cx="11430000" cy="292608"/>
+            <a:off x="7315200" y="2880360"/>
+            <a:ext cx="4480560" cy="239395"/>
           </a:xfrm>
           <a:prstGeom prst="rect">
             <a:avLst/>
@@ -3760,7 +4222,7 @@
           <a:effectLst/>
         </p:spPr>
         <p:txBody>
-          <a:bodyPr wrap="square" lIns="27432" rIns="27432" tIns="18288" bIns="18288" anchor="ctr">
+          <a:bodyPr wrap="none" lIns="18288" rIns="18288" tIns="18288" bIns="18288" anchor="t">
             <a:spAutoFit/>
           </a:bodyPr>
           <a:lstStyle/>
@@ -3771,27 +4233,27 @@
               </a:spcAft>
             </a:pPr>
             <a:r>
-              <a:rPr sz="1150" b="0" i="0">
+              <a:rPr sz="1250" b="1" i="0">
                 <a:solidFill>
-                  <a:srgbClr val="8EDBD4"/>
+                  <a:srgbClr val="E7F0F3"/>
                 </a:solidFill>
                 <a:latin typeface="Arial"/>
               </a:rPr>
-              <a:t>Fixed clamps perform no boundary work.</a:t>
-            </a:r>
-          </a:p>
-        </p:txBody>
-      </p:sp>
-      <p:sp>
-        <p:nvSpPr>
-          <p:cNvPr id="21" name="C4-E41 text 19" descr="sci-ppt:o019"/>
+              <a:t>−∫ T₀ ∇²w ẇ dA = dU_T/dt</a:t>
+            </a:r>
+          </a:p>
+        </p:txBody>
+      </p:sp>
+      <p:sp>
+        <p:nvSpPr>
+          <p:cNvPr id="35" name="C4-E41 text 33" descr="sci-ppt:o033"/>
           <p:cNvSpPr txBox="1"/>
           <p:nvPr/>
         </p:nvSpPr>
         <p:spPr>
           <a:xfrm>
-            <a:off x="320040" y="5870448"/>
-            <a:ext cx="11430000" cy="292608"/>
+            <a:off x="6126480" y="3657600"/>
+            <a:ext cx="5577840" cy="231648"/>
           </a:xfrm>
           <a:prstGeom prst="rect">
             <a:avLst/>
@@ -3800,7 +4262,7 @@
           <a:effectLst/>
         </p:spPr>
         <p:txBody>
-          <a:bodyPr wrap="square" lIns="27432" rIns="27432" tIns="18288" bIns="18288" anchor="ctr">
+          <a:bodyPr wrap="none" lIns="18288" rIns="18288" tIns="18288" bIns="18288" anchor="t">
             <a:spAutoFit/>
           </a:bodyPr>
           <a:lstStyle/>
@@ -3811,27 +4273,27 @@
               </a:spcAft>
             </a:pPr>
             <a:r>
-              <a:rPr sz="1150" b="0" i="0">
+              <a:rPr sz="1200" b="0" i="0">
                 <a:solidFill>
-                  <a:srgbClr val="8EDBD4"/>
+                  <a:srgbClr val="F2B880"/>
                 </a:solidFill>
                 <a:latin typeface="Arial"/>
               </a:rPr>
-              <a:t>Recoverable cohesion and fracture loss must be counted once.</a:t>
-            </a:r>
-          </a:p>
-        </p:txBody>
-      </p:sp>
-      <p:sp>
-        <p:nvSpPr>
-          <p:cNvPr id="22" name="C4-E41 text 20" descr="sci-ppt:o020"/>
+              <a:t>These identities need the fixed clamp: boundary power terms are zero.</a:t>
+            </a:r>
+          </a:p>
+        </p:txBody>
+      </p:sp>
+      <p:sp>
+        <p:nvSpPr>
+          <p:cNvPr id="36" name="C4-E41 text 34" descr="sci-ppt:o034"/>
           <p:cNvSpPr txBox="1"/>
           <p:nvPr/>
         </p:nvSpPr>
         <p:spPr>
           <a:xfrm>
-            <a:off x="320040" y="6473952"/>
-            <a:ext cx="11430000" cy="256032"/>
+            <a:off x="6126480" y="4297680"/>
+            <a:ext cx="5577840" cy="433070"/>
           </a:xfrm>
           <a:prstGeom prst="rect">
             <a:avLst/>
@@ -3840,7 +4302,63 @@
           <a:effectLst/>
         </p:spPr>
         <p:txBody>
-          <a:bodyPr wrap="square" lIns="27432" rIns="27432" tIns="18288" bIns="18288" anchor="ctr">
+          <a:bodyPr wrap="none" lIns="18288" rIns="18288" tIns="18288" bIns="18288" anchor="t">
+            <a:spAutoFit/>
+          </a:bodyPr>
+          <a:lstStyle/>
+          <a:p>
+            <a:pPr algn="l">
+              <a:spcAft>
+                <a:spcPts val="0"/>
+              </a:spcAft>
+            </a:pPr>
+            <a:r>
+              <a:rPr sz="1250" b="0" i="0">
+                <a:solidFill>
+                  <a:srgbClr val="E7F0F3"/>
+                </a:solidFill>
+                <a:latin typeface="Arial"/>
+              </a:rPr>
+              <a:t>Reading: the film cannot gain energy except through the work of</a:t>
+            </a:r>
+          </a:p>
+          <a:p>
+            <a:pPr algn="l">
+              <a:spcAft>
+                <a:spcPts val="0"/>
+              </a:spcAft>
+            </a:pPr>
+            <a:r>
+              <a:rPr sz="1250" b="0" i="0">
+                <a:solidFill>
+                  <a:srgbClr val="E7F0F3"/>
+                </a:solidFill>
+                <a:latin typeface="Arial"/>
+              </a:rPr>
+              <a:t>the load, minus what the cohesive layer takes.</a:t>
+            </a:r>
+          </a:p>
+        </p:txBody>
+      </p:sp>
+      <p:sp>
+        <p:nvSpPr>
+          <p:cNvPr id="37" name="C4-E41 text 35" descr="sci-ppt:o035"/>
+          <p:cNvSpPr txBox="1"/>
+          <p:nvPr/>
+        </p:nvSpPr>
+        <p:spPr>
+          <a:xfrm>
+            <a:off x="320040" y="6510528"/>
+            <a:ext cx="11521440" cy="200660"/>
+          </a:xfrm>
+          <a:prstGeom prst="rect">
+            <a:avLst/>
+          </a:prstGeom>
+          <a:noFill/>
+          <a:effectLst/>
+        </p:spPr>
+        <p:txBody>
+          <a:bodyPr wrap="none" lIns="18288" rIns="18288" tIns="18288" bIns="18288" anchor="t">
             <a:spAutoFit/>
           </a:bodyPr>
           <a:lstStyle/>
@@ -3857,7 +4375,7 @@
                 </a:solidFill>
                 <a:latin typeface="Arial"/>
               </a:rPr>
-              <a:t>Model schematic; geometry is not to scale.</a:t>
+              <a:t>Plate power identity of Eq. C4-E41; waterfall values are illustrative.</a:t>
             </a:r>
           </a:p>
         </p:txBody>
